--- a/Review 1.pptx
+++ b/Review 1.pptx
@@ -29,26 +29,26 @@
       <p:regular r:id="rId19"/>
     </p:embeddedFont>
     <p:embeddedFont>
-      <p:font typeface="Algerian" panose="04020705040A02060702"/>
+      <p:font typeface="Comic Sans MS" panose="030F0702030302020204" charset="0"/>
       <p:regular r:id="rId20"/>
+      <p:bold r:id="rId21"/>
+      <p:italic r:id="rId22"/>
+      <p:boldItalic r:id="rId23"/>
     </p:embeddedFont>
     <p:embeddedFont>
-      <p:font typeface="Comic Sans MS" panose="030F0702030302020204" charset="0"/>
-      <p:regular r:id="rId21"/>
-      <p:bold r:id="rId22"/>
-      <p:italic r:id="rId23"/>
-      <p:boldItalic r:id="rId24"/>
+      <p:font typeface="Merriweather" panose="00000500000000000000"/>
+      <p:regular r:id="rId24"/>
+      <p:bold r:id="rId25"/>
+      <p:italic r:id="rId26"/>
+      <p:boldItalic r:id="rId27"/>
     </p:embeddedFont>
     <p:embeddedFont>
       <p:font typeface="Cambria Math" panose="02040503050406030204"/>
-      <p:regular r:id="rId25"/>
+      <p:regular r:id="rId28"/>
     </p:embeddedFont>
     <p:embeddedFont>
-      <p:font typeface="Merriweather" panose="00000500000000000000"/>
-      <p:regular r:id="rId26"/>
-      <p:bold r:id="rId27"/>
-      <p:italic r:id="rId28"/>
-      <p:boldItalic r:id="rId29"/>
+      <p:font typeface="Algerian" panose="04020705040A02060702"/>
+      <p:regular r:id="rId29"/>
     </p:embeddedFont>
   </p:embeddedFontLst>
   <p:defaultTextStyle>
@@ -7509,7 +7509,7 @@
                 <a:latin typeface="Comic Sans MS" panose="030F0702030302020204" charset="0"/>
                 <a:cs typeface="Comic Sans MS" panose="030F0702030302020204" charset="0"/>
               </a:rPr>
-              <a:t>Date: 16/10/2024</a:t>
+              <a:t>Date: 17/10/2024</a:t>
             </a:r>
             <a:endParaRPr lang="en-US">
               <a:solidFill>
@@ -9878,7 +9878,7 @@
       </p:sp>
       <p:pic>
         <p:nvPicPr>
-          <p:cNvPr id="1" name="Picture Placeholder 0" descr="Untitled Diagram2.drawio (1)_page-0001"/>
+          <p:cNvPr id="2" name="Picture Placeholder 1" descr="Untitled Diagram2.drawio (1)_page-0001"/>
           <p:cNvPicPr>
             <a:picLocks noChangeAspect="1"/>
           </p:cNvPicPr>

--- a/Review 1.pptx
+++ b/Review 1.pptx
@@ -8533,50 +8533,33 @@
           </a:bodyPr>
           <a:lstStyle/>
           <a:p>
-            <a:pPr lvl="0" algn="just" rtl="0">
+            <a:pPr marL="285750" indent="-285750" algn="just">
               <a:lnSpc>
                 <a:spcPct val="150000"/>
               </a:lnSpc>
-              <a:spcBef>
-                <a:spcPts val="0"/>
-              </a:spcBef>
-              <a:spcAft>
-                <a:spcPts val="0"/>
-              </a:spcAft>
-              <a:buClr>
-                <a:srgbClr val="FFFFFF"/>
-              </a:buClr>
-              <a:buSzPts val="1800"/>
               <a:buFont typeface="Wingdings" panose="05000000000000000000" charset="0"/>
               <a:buChar char="q"/>
             </a:pPr>
             <a:r>
-              <a:rPr lang="en-GB" sz="1800">
+              <a:rPr lang="en-US" sz="1800" dirty="0">
                 <a:latin typeface="Comic Sans MS" panose="030F0702030302020204" charset="0"/>
-                <a:cs typeface="Comic Sans MS" panose="030F0702030302020204" charset="0"/>
+                <a:ea typeface="Open Sans" panose="020B0606030504020204" pitchFamily="34" charset="0"/>
+                <a:cs typeface="Open Sans" panose="020B0606030504020204" pitchFamily="34" charset="0"/>
+                <a:sym typeface="+mn-ea"/>
               </a:rPr>
-              <a:t>A Hospital Management System (HMS) is a comprehensive software platform designed to manage the operations of a hospital or healthcare facility. </a:t>
+              <a:t>A hospital management system (HMS) is a comprehensive software solution designed to streamline and automate various administrative, clinical, and financial processes within a healthcare facility.</a:t>
             </a:r>
-            <a:endParaRPr lang="en-GB" sz="1800">
+            <a:endParaRPr lang="en-US" sz="1800" dirty="0">
               <a:latin typeface="Comic Sans MS" panose="030F0702030302020204" charset="0"/>
-              <a:cs typeface="Comic Sans MS" panose="030F0702030302020204" charset="0"/>
+              <a:ea typeface="Open Sans" panose="020B0606030504020204" pitchFamily="34" charset="0"/>
+              <a:cs typeface="Open Sans" panose="020B0606030504020204" pitchFamily="34" charset="0"/>
             </a:endParaRPr>
           </a:p>
           <a:p>
-            <a:pPr lvl="0" algn="just" rtl="0">
+            <a:pPr marL="285750" indent="-285750" algn="just">
               <a:lnSpc>
                 <a:spcPct val="150000"/>
               </a:lnSpc>
-              <a:spcBef>
-                <a:spcPts val="0"/>
-              </a:spcBef>
-              <a:spcAft>
-                <a:spcPts val="0"/>
-              </a:spcAft>
-              <a:buClr>
-                <a:srgbClr val="FFFFFF"/>
-              </a:buClr>
-              <a:buSzPts val="1800"/>
               <a:buFont typeface="Wingdings" panose="05000000000000000000" charset="0"/>
               <a:buChar char="q"/>
             </a:pPr>
@@ -8593,20 +8576,10 @@
             </a:endParaRPr>
           </a:p>
           <a:p>
-            <a:pPr lvl="0" algn="just" rtl="0">
+            <a:pPr marL="285750" indent="-285750" algn="just">
               <a:lnSpc>
                 <a:spcPct val="150000"/>
               </a:lnSpc>
-              <a:spcBef>
-                <a:spcPts val="0"/>
-              </a:spcBef>
-              <a:spcAft>
-                <a:spcPts val="0"/>
-              </a:spcAft>
-              <a:buClr>
-                <a:srgbClr val="FFFFFF"/>
-              </a:buClr>
-              <a:buSzPts val="1800"/>
               <a:buFont typeface="Wingdings" panose="05000000000000000000" charset="0"/>
               <a:buChar char="q"/>
             </a:pPr>
@@ -8771,7 +8744,21 @@
                 <a:latin typeface="Comic Sans MS" panose="030F0702030302020204" charset="0"/>
                 <a:cs typeface="Comic Sans MS" panose="030F0702030302020204" charset="0"/>
               </a:rPr>
-              <a:t>his HMS is built using the MERN stack—a combination of MongoDB, Express.js, React, and Node.js.Every element in the stack is essential to creating a cutting-edge, adaptable, and data-driven hospital management system</a:t>
+              <a:t>his HMS is built using the MERN stack—a combination of MongoDB, Express.js, React, and Node.js.</a:t>
+            </a:r>
+            <a:r>
+              <a:rPr lang="en-US" altLang="en-GB" sz="1800">
+                <a:latin typeface="Comic Sans MS" panose="030F0702030302020204" charset="0"/>
+                <a:cs typeface="Comic Sans MS" panose="030F0702030302020204" charset="0"/>
+              </a:rPr>
+              <a:t> </a:t>
+            </a:r>
+            <a:r>
+              <a:rPr lang="en-GB" sz="1800">
+                <a:latin typeface="Comic Sans MS" panose="030F0702030302020204" charset="0"/>
+                <a:cs typeface="Comic Sans MS" panose="030F0702030302020204" charset="0"/>
+              </a:rPr>
+              <a:t>Every element in the stack is essential to creating a cutting-edge, adaptable, and data-driven hospital management system</a:t>
             </a:r>
             <a:r>
               <a:rPr lang="en-US" altLang="en-GB" sz="1800">
@@ -9552,7 +9539,7 @@
                 <a:cs typeface="Open Sans" panose="020B0606030504020204" pitchFamily="34" charset="0"/>
                 <a:sym typeface="+mn-ea"/>
               </a:rPr>
-              <a:t>Phase 1: Project planning and brainstorming(July)</a:t>
+              <a:t>Phase 1: Project planning and brainstorming (July)</a:t>
             </a:r>
             <a:endParaRPr lang="en-US" sz="1800" b="0" dirty="0">
               <a:latin typeface="Comic Sans MS" panose="030F0702030302020204" charset="0"/>

--- a/Review 1.pptx
+++ b/Review 1.pptx
@@ -12,43 +12,44 @@
     <p:sldId id="257" r:id="rId5"/>
     <p:sldId id="275" r:id="rId6"/>
     <p:sldId id="305" r:id="rId7"/>
-    <p:sldId id="291" r:id="rId8"/>
-    <p:sldId id="307" r:id="rId9"/>
-    <p:sldId id="292" r:id="rId10"/>
-    <p:sldId id="308" r:id="rId11"/>
-    <p:sldId id="297" r:id="rId12"/>
-    <p:sldId id="300" r:id="rId13"/>
-    <p:sldId id="302" r:id="rId14"/>
-    <p:sldId id="303" r:id="rId15"/>
+    <p:sldId id="314" r:id="rId8"/>
+    <p:sldId id="291" r:id="rId9"/>
+    <p:sldId id="307" r:id="rId10"/>
+    <p:sldId id="292" r:id="rId11"/>
+    <p:sldId id="308" r:id="rId12"/>
+    <p:sldId id="297" r:id="rId13"/>
+    <p:sldId id="300" r:id="rId14"/>
+    <p:sldId id="302" r:id="rId15"/>
+    <p:sldId id="303" r:id="rId16"/>
   </p:sldIdLst>
   <p:sldSz cx="9144000" cy="5143500"/>
   <p:notesSz cx="6858000" cy="9144000"/>
   <p:embeddedFontLst>
     <p:embeddedFont>
       <p:font typeface="Algerian" panose="04020705040A02060702" charset="0"/>
-      <p:regular r:id="rId19"/>
+      <p:regular r:id="rId20"/>
     </p:embeddedFont>
     <p:embeddedFont>
       <p:font typeface="Comic Sans MS" panose="030F0702030302020204" charset="0"/>
-      <p:regular r:id="rId20"/>
-      <p:bold r:id="rId21"/>
-      <p:italic r:id="rId22"/>
-      <p:boldItalic r:id="rId23"/>
+      <p:regular r:id="rId21"/>
+      <p:bold r:id="rId22"/>
+      <p:italic r:id="rId23"/>
+      <p:boldItalic r:id="rId24"/>
     </p:embeddedFont>
     <p:embeddedFont>
       <p:font typeface="Merriweather" panose="00000500000000000000"/>
-      <p:regular r:id="rId24"/>
-      <p:bold r:id="rId25"/>
-      <p:italic r:id="rId26"/>
-      <p:boldItalic r:id="rId27"/>
+      <p:regular r:id="rId25"/>
+      <p:bold r:id="rId26"/>
+      <p:italic r:id="rId27"/>
+      <p:boldItalic r:id="rId28"/>
     </p:embeddedFont>
     <p:embeddedFont>
       <p:font typeface="Cambria Math" panose="02040503050406030204"/>
-      <p:regular r:id="rId28"/>
+      <p:regular r:id="rId29"/>
     </p:embeddedFont>
     <p:embeddedFont>
       <p:font typeface="Algerian" panose="04020705040A02060702"/>
-      <p:regular r:id="rId29"/>
+      <p:regular r:id="rId30"/>
     </p:embeddedFont>
   </p:embeddedFontLst>
   <p:defaultTextStyle>
@@ -288,7 +289,7 @@
             <a:srgbClr val="A4A3A4"/>
           </p15:clr>
         </p15:guide>
-        <p15:guide id="2" pos="2871" userDrawn="1">
+        <p15:guide id="2" pos="2802" userDrawn="1">
           <p15:clr>
             <a:srgbClr val="A4A3A4"/>
           </p15:clr>
@@ -1032,6 +1033,105 @@
 </file>
 
 <file path=ppt/notesSlides/notesSlide12.xml><?xml version="1.0" encoding="utf-8"?>
+<p:notes xmlns:a="http://schemas.openxmlformats.org/drawingml/2006/main" xmlns:r="http://schemas.openxmlformats.org/officeDocument/2006/relationships" xmlns:p="http://schemas.openxmlformats.org/presentationml/2006/main" showMasterPhAnim="0" showMasterSp="0">
+  <p:cSld>
+    <p:spTree>
+      <p:nvGrpSpPr>
+        <p:cNvPr id="50" name="Shape 50"/>
+        <p:cNvGrpSpPr/>
+        <p:nvPr/>
+      </p:nvGrpSpPr>
+      <p:grpSpPr>
+        <a:xfrm>
+          <a:off x="0" y="0"/>
+          <a:ext cx="0" cy="0"/>
+          <a:chOff x="0" y="0"/>
+          <a:chExt cx="0" cy="0"/>
+        </a:xfrm>
+      </p:grpSpPr>
+      <p:sp>
+        <p:nvSpPr>
+          <p:cNvPr id="51" name="Google Shape;51;gaa74f48cca_3_44:notes"/>
+          <p:cNvSpPr/>
+          <p:nvPr>
+            <p:ph type="sldImg" idx="2"/>
+          </p:nvPr>
+        </p:nvSpPr>
+        <p:spPr>
+          <a:xfrm>
+            <a:off x="381300" y="685800"/>
+            <a:ext cx="6096000" cy="3429000"/>
+          </a:xfrm>
+          <a:custGeom>
+            <a:avLst/>
+            <a:gdLst/>
+            <a:ahLst/>
+            <a:cxnLst/>
+            <a:rect l="l" t="t" r="r" b="b"/>
+            <a:pathLst>
+              <a:path w="120000" h="120000" extrusionOk="0">
+                <a:moveTo>
+                  <a:pt x="0" y="0"/>
+                </a:moveTo>
+                <a:lnTo>
+                  <a:pt x="120000" y="0"/>
+                </a:lnTo>
+                <a:lnTo>
+                  <a:pt x="120000" y="120000"/>
+                </a:lnTo>
+                <a:lnTo>
+                  <a:pt x="0" y="120000"/>
+                </a:lnTo>
+                <a:close/>
+              </a:path>
+            </a:pathLst>
+          </a:custGeom>
+        </p:spPr>
+      </p:sp>
+      <p:sp>
+        <p:nvSpPr>
+          <p:cNvPr id="52" name="Google Shape;52;gaa74f48cca_3_44:notes"/>
+          <p:cNvSpPr txBox="1"/>
+          <p:nvPr>
+            <p:ph type="body" idx="1"/>
+          </p:nvPr>
+        </p:nvSpPr>
+        <p:spPr>
+          <a:xfrm>
+            <a:off x="685800" y="4343400"/>
+            <a:ext cx="5486400" cy="4114800"/>
+          </a:xfrm>
+          <a:prstGeom prst="rect">
+            <a:avLst/>
+          </a:prstGeom>
+        </p:spPr>
+        <p:txBody>
+          <a:bodyPr spcFirstLastPara="1" wrap="square" lIns="91425" tIns="91425" rIns="91425" bIns="91425" anchor="t" anchorCtr="0">
+            <a:noAutofit/>
+          </a:bodyPr>
+          <a:lstStyle/>
+          <a:p>
+            <a:pPr marL="0" lvl="0" indent="0" algn="l" rtl="0">
+              <a:spcBef>
+                <a:spcPts val="0"/>
+              </a:spcBef>
+              <a:spcAft>
+                <a:spcPts val="0"/>
+              </a:spcAft>
+              <a:buNone/>
+            </a:pPr>
+          </a:p>
+        </p:txBody>
+      </p:sp>
+    </p:spTree>
+  </p:cSld>
+  <p:clrMapOvr>
+    <a:masterClrMapping/>
+  </p:clrMapOvr>
+</p:notes>
+</file>
+
+<file path=ppt/notesSlides/notesSlide13.xml><?xml version="1.0" encoding="utf-8"?>
 <p:notes xmlns:a="http://schemas.openxmlformats.org/drawingml/2006/main" xmlns:r="http://schemas.openxmlformats.org/officeDocument/2006/relationships" xmlns:p="http://schemas.openxmlformats.org/presentationml/2006/main" showMasterPhAnim="0" showMasterSp="0">
   <p:cSld>
     <p:spTree>
@@ -7567,6 +7667,135 @@
         </p:nvSpPr>
         <p:spPr>
           <a:xfrm>
+            <a:off x="194310" y="1033145"/>
+            <a:ext cx="2332990" cy="1778000"/>
+          </a:xfrm>
+          <a:prstGeom prst="rect">
+            <a:avLst/>
+          </a:prstGeom>
+        </p:spPr>
+        <p:txBody>
+          <a:bodyPr spcFirstLastPara="1" wrap="square" lIns="91425" tIns="45700" rIns="91425" bIns="45700" anchor="ctr" anchorCtr="0">
+            <a:noAutofit/>
+          </a:bodyPr>
+          <a:lstStyle/>
+          <a:p>
+            <a:pPr marL="0" lvl="0" indent="0" algn="l" rtl="0">
+              <a:spcBef>
+                <a:spcPts val="0"/>
+              </a:spcBef>
+              <a:spcAft>
+                <a:spcPts val="0"/>
+              </a:spcAft>
+              <a:buNone/>
+            </a:pPr>
+            <a:r>
+              <a:rPr lang="en-US" b="0" u="sng">
+                <a:latin typeface="Algerian" panose="04020705040A02060702"/>
+                <a:ea typeface="Algerian" panose="04020705040A02060702"/>
+                <a:cs typeface="Algerian" panose="04020705040A02060702"/>
+                <a:sym typeface="Algerian" panose="04020705040A02060702"/>
+              </a:rPr>
+              <a:t>proposed </a:t>
+            </a:r>
+            <a:br>
+              <a:rPr lang="en-US" b="0" u="sng">
+                <a:latin typeface="Algerian" panose="04020705040A02060702"/>
+                <a:ea typeface="Algerian" panose="04020705040A02060702"/>
+                <a:cs typeface="Algerian" panose="04020705040A02060702"/>
+                <a:sym typeface="Algerian" panose="04020705040A02060702"/>
+              </a:rPr>
+            </a:br>
+            <a:r>
+              <a:rPr lang="en-US" b="0" u="sng">
+                <a:latin typeface="Algerian" panose="04020705040A02060702"/>
+                <a:ea typeface="Algerian" panose="04020705040A02060702"/>
+                <a:cs typeface="Algerian" panose="04020705040A02060702"/>
+                <a:sym typeface="Algerian" panose="04020705040A02060702"/>
+              </a:rPr>
+              <a:t>architecture</a:t>
+            </a:r>
+            <a:endParaRPr lang="en-US" b="0" u="sng">
+              <a:latin typeface="Algerian" panose="04020705040A02060702"/>
+              <a:ea typeface="Algerian" panose="04020705040A02060702"/>
+              <a:cs typeface="Algerian" panose="04020705040A02060702"/>
+              <a:sym typeface="Algerian" panose="04020705040A02060702"/>
+            </a:endParaRPr>
+          </a:p>
+        </p:txBody>
+      </p:sp>
+      <p:pic>
+        <p:nvPicPr>
+          <p:cNvPr id="2" name="Picture Placeholder 1" descr="Untitled Diagram2.drawio (1)_page-0001"/>
+          <p:cNvPicPr>
+            <a:picLocks noChangeAspect="1"/>
+          </p:cNvPicPr>
+          <p:nvPr>
+            <p:ph type="pic" idx="2"/>
+          </p:nvPr>
+        </p:nvPicPr>
+        <p:blipFill>
+          <a:blip r:embed="rId2"/>
+          <a:stretch>
+            <a:fillRect/>
+          </a:stretch>
+        </p:blipFill>
+        <p:spPr>
+          <a:xfrm>
+            <a:off x="2454275" y="167005"/>
+            <a:ext cx="6506210" cy="4887595"/>
+          </a:xfrm>
+          <a:prstGeom prst="rect">
+            <a:avLst/>
+          </a:prstGeom>
+        </p:spPr>
+      </p:pic>
+    </p:spTree>
+  </p:cSld>
+  <p:clrMapOvr>
+    <a:masterClrMapping/>
+  </p:clrMapOvr>
+</p:sld>
+</file>
+
+<file path=ppt/slides/slide11.xml><?xml version="1.0" encoding="utf-8"?>
+<p:sld xmlns:a="http://schemas.openxmlformats.org/drawingml/2006/main" xmlns:r="http://schemas.openxmlformats.org/officeDocument/2006/relationships" xmlns:p="http://schemas.openxmlformats.org/presentationml/2006/main">
+  <p:cSld>
+    <p:bg>
+      <p:bgPr>
+        <a:blipFill rotWithShape="1">
+          <a:blip r:embed="rId1"/>
+          <a:stretch>
+            <a:fillRect/>
+          </a:stretch>
+        </a:blipFill>
+        <a:effectLst/>
+      </p:bgPr>
+    </p:bg>
+    <p:spTree>
+      <p:nvGrpSpPr>
+        <p:cNvPr id="53" name="Shape 53"/>
+        <p:cNvGrpSpPr/>
+        <p:nvPr/>
+      </p:nvGrpSpPr>
+      <p:grpSpPr>
+        <a:xfrm>
+          <a:off x="0" y="0"/>
+          <a:ext cx="0" cy="0"/>
+          <a:chOff x="0" y="0"/>
+          <a:chExt cx="0" cy="0"/>
+        </a:xfrm>
+      </p:grpSpPr>
+      <p:sp>
+        <p:nvSpPr>
+          <p:cNvPr id="54" name="Google Shape;54;p14"/>
+          <p:cNvSpPr txBox="1"/>
+          <p:nvPr>
+            <p:ph type="title"/>
+          </p:nvPr>
+        </p:nvSpPr>
+        <p:spPr>
+          <a:xfrm>
             <a:off x="793150" y="212383"/>
             <a:ext cx="6408600" cy="637500"/>
           </a:xfrm>
@@ -7824,7 +8053,7 @@
 </p:sld>
 </file>
 
-<file path=ppt/slides/slide11.xml><?xml version="1.0" encoding="utf-8"?>
+<file path=ppt/slides/slide12.xml><?xml version="1.0" encoding="utf-8"?>
 <p:sld xmlns:a="http://schemas.openxmlformats.org/drawingml/2006/main" xmlns:r="http://schemas.openxmlformats.org/officeDocument/2006/relationships" xmlns:p="http://schemas.openxmlformats.org/presentationml/2006/main">
   <p:cSld>
     <p:bg>
@@ -8022,7 +8251,7 @@
 </p:sld>
 </file>
 
-<file path=ppt/slides/slide12.xml><?xml version="1.0" encoding="utf-8"?>
+<file path=ppt/slides/slide13.xml><?xml version="1.0" encoding="utf-8"?>
 <p:sld xmlns:a="http://schemas.openxmlformats.org/drawingml/2006/main" xmlns:r="http://schemas.openxmlformats.org/officeDocument/2006/relationships" xmlns:p="http://schemas.openxmlformats.org/presentationml/2006/main">
   <p:cSld>
     <p:bg>
@@ -8407,6 +8636,33 @@
                 <a:cs typeface="Comic Sans MS" panose="030F0702030302020204" charset="0"/>
               </a:rPr>
               <a:t>Technologies to be used</a:t>
+            </a:r>
+            <a:endParaRPr lang="en-US" altLang="en-GB" sz="1800">
+              <a:latin typeface="Comic Sans MS" panose="030F0702030302020204" charset="0"/>
+              <a:cs typeface="Comic Sans MS" panose="030F0702030302020204" charset="0"/>
+            </a:endParaRPr>
+          </a:p>
+          <a:p>
+            <a:pPr lvl="0" algn="l" rtl="0">
+              <a:lnSpc>
+                <a:spcPct val="150000"/>
+              </a:lnSpc>
+              <a:spcBef>
+                <a:spcPts val="360"/>
+              </a:spcBef>
+              <a:spcAft>
+                <a:spcPts val="0"/>
+              </a:spcAft>
+              <a:buSzPts val="1800"/>
+              <a:buFont typeface="Wingdings" panose="05000000000000000000" charset="0"/>
+              <a:buChar char="q"/>
+            </a:pPr>
+            <a:r>
+              <a:rPr lang="en-US" altLang="en-GB" sz="1800">
+                <a:latin typeface="Comic Sans MS" panose="030F0702030302020204" charset="0"/>
+                <a:cs typeface="Comic Sans MS" panose="030F0702030302020204" charset="0"/>
+              </a:rPr>
+              <a:t>Reference Links</a:t>
             </a:r>
             <a:endParaRPr lang="en-US" altLang="en-GB" sz="1800">
               <a:latin typeface="Comic Sans MS" panose="030F0702030302020204" charset="0"/>
@@ -8872,186 +9128,57 @@
       </p:grpSpPr>
       <p:sp>
         <p:nvSpPr>
-          <p:cNvPr id="54" name="Google Shape;54;p14"/>
-          <p:cNvSpPr txBox="1"/>
+          <p:cNvPr id="5" name="Text Placeholder 4"/>
+          <p:cNvSpPr/>
           <p:nvPr>
-            <p:ph type="title"/>
+            <p:ph type="body" idx="1"/>
           </p:nvPr>
         </p:nvSpPr>
+        <p:spPr/>
+        <p:txBody>
+          <a:bodyPr/>
+          <a:p>
+            <a:pPr algn="ctr"/>
+            <a:r>
+              <a:rPr lang="en-US" sz="2000">
+                <a:latin typeface="Algerian" panose="04020705040A02060702" charset="0"/>
+                <a:cs typeface="Algerian" panose="04020705040A02060702" charset="0"/>
+              </a:rPr>
+              <a:t>Working of MERN Stack</a:t>
+            </a:r>
+            <a:endParaRPr lang="en-US" sz="2000">
+              <a:latin typeface="Algerian" panose="04020705040A02060702" charset="0"/>
+              <a:cs typeface="Algerian" panose="04020705040A02060702" charset="0"/>
+            </a:endParaRPr>
+          </a:p>
+        </p:txBody>
+      </p:sp>
+      <p:pic>
+        <p:nvPicPr>
+          <p:cNvPr id="3" name="Picture Placeholder 2" descr="mern"/>
+          <p:cNvPicPr>
+            <a:picLocks noChangeAspect="1"/>
+          </p:cNvPicPr>
+          <p:nvPr>
+            <p:ph type="pic" idx="2"/>
+          </p:nvPr>
+        </p:nvPicPr>
+        <p:blipFill>
+          <a:blip r:embed="rId2"/>
+          <a:stretch>
+            <a:fillRect/>
+          </a:stretch>
+        </p:blipFill>
         <p:spPr>
           <a:xfrm>
-            <a:off x="246380" y="97790"/>
-            <a:ext cx="8804275" cy="673735"/>
+            <a:off x="2123440" y="295910"/>
+            <a:ext cx="4824445" cy="3600000"/>
           </a:xfrm>
           <a:prstGeom prst="rect">
             <a:avLst/>
           </a:prstGeom>
         </p:spPr>
-        <p:txBody>
-          <a:bodyPr spcFirstLastPara="1" wrap="square" lIns="91425" tIns="45700" rIns="91425" bIns="45700" anchor="ctr" anchorCtr="0">
-            <a:noAutofit/>
-          </a:bodyPr>
-          <a:lstStyle/>
-          <a:p>
-            <a:pPr marL="0" lvl="0" indent="0" algn="l" rtl="0">
-              <a:spcBef>
-                <a:spcPts val="0"/>
-              </a:spcBef>
-              <a:spcAft>
-                <a:spcPts val="0"/>
-              </a:spcAft>
-              <a:buNone/>
-            </a:pPr>
-            <a:r>
-              <a:rPr lang="en-US" altLang="en-GB" sz="3400" u="sng">
-                <a:latin typeface="Algerian" panose="04020705040A02060702"/>
-                <a:ea typeface="Algerian" panose="04020705040A02060702"/>
-                <a:cs typeface="Algerian" panose="04020705040A02060702"/>
-                <a:sym typeface="Algerian" panose="04020705040A02060702"/>
-              </a:rPr>
-              <a:t>gaps identified</a:t>
-            </a:r>
-            <a:endParaRPr lang="en-US" altLang="en-GB" sz="3400" u="sng">
-              <a:latin typeface="Algerian" panose="04020705040A02060702"/>
-              <a:ea typeface="Algerian" panose="04020705040A02060702"/>
-              <a:cs typeface="Algerian" panose="04020705040A02060702"/>
-              <a:sym typeface="Algerian" panose="04020705040A02060702"/>
-            </a:endParaRPr>
-          </a:p>
-        </p:txBody>
-      </p:sp>
-      <p:sp>
-        <p:nvSpPr>
-          <p:cNvPr id="55" name="Google Shape;55;p14"/>
-          <p:cNvSpPr txBox="1"/>
-          <p:nvPr>
-            <p:ph type="body" idx="1"/>
-          </p:nvPr>
-        </p:nvSpPr>
-        <p:spPr>
-          <a:xfrm>
-            <a:off x="107315" y="771525"/>
-            <a:ext cx="8943975" cy="4313555"/>
-          </a:xfrm>
-          <a:prstGeom prst="rect">
-            <a:avLst/>
-          </a:prstGeom>
-        </p:spPr>
-        <p:txBody>
-          <a:bodyPr spcFirstLastPara="1" wrap="square" lIns="91425" tIns="45700" rIns="91425" bIns="45700" anchor="t" anchorCtr="0">
-            <a:noAutofit/>
-          </a:bodyPr>
-          <a:lstStyle/>
-          <a:p>
-            <a:pPr lvl="0" algn="l" rtl="0">
-              <a:lnSpc>
-                <a:spcPct val="150000"/>
-              </a:lnSpc>
-              <a:spcBef>
-                <a:spcPts val="360"/>
-              </a:spcBef>
-              <a:spcAft>
-                <a:spcPts val="0"/>
-              </a:spcAft>
-              <a:buSzPts val="1800"/>
-              <a:buFont typeface="Wingdings" panose="05000000000000000000" charset="0"/>
-              <a:buChar char="q"/>
-            </a:pPr>
-            <a:r>
-              <a:rPr sz="1800">
-                <a:latin typeface="Comic Sans MS" panose="030F0702030302020204" charset="0"/>
-                <a:cs typeface="Comic Sans MS" panose="030F0702030302020204" charset="0"/>
-              </a:rPr>
-              <a:t>The system may not be accessible to individuals with limited internet access or technological proficiency [4].</a:t>
-            </a:r>
-            <a:endParaRPr sz="1800">
-              <a:latin typeface="Comic Sans MS" panose="030F0702030302020204" charset="0"/>
-              <a:cs typeface="Comic Sans MS" panose="030F0702030302020204" charset="0"/>
-            </a:endParaRPr>
-          </a:p>
-          <a:p>
-            <a:pPr lvl="0" algn="l" rtl="0">
-              <a:lnSpc>
-                <a:spcPct val="150000"/>
-              </a:lnSpc>
-              <a:spcBef>
-                <a:spcPts val="360"/>
-              </a:spcBef>
-              <a:spcAft>
-                <a:spcPts val="0"/>
-              </a:spcAft>
-              <a:buSzPts val="1800"/>
-              <a:buFont typeface="Wingdings" panose="05000000000000000000" charset="0"/>
-              <a:buChar char="q"/>
-            </a:pPr>
-            <a:r>
-              <a:rPr sz="1800">
-                <a:latin typeface="Comic Sans MS" panose="030F0702030302020204" charset="0"/>
-                <a:cs typeface="Comic Sans MS" panose="030F0702030302020204" charset="0"/>
-              </a:rPr>
-              <a:t>The system's reliability in accurately directing patients to the right department based on their symptoms might be a challenge, especially if the symptoms are complex or require in-person evaluation [5].</a:t>
-            </a:r>
-            <a:endParaRPr sz="1800">
-              <a:latin typeface="Comic Sans MS" panose="030F0702030302020204" charset="0"/>
-              <a:cs typeface="Comic Sans MS" panose="030F0702030302020204" charset="0"/>
-            </a:endParaRPr>
-          </a:p>
-          <a:p>
-            <a:pPr lvl="0" algn="l" rtl="0">
-              <a:lnSpc>
-                <a:spcPct val="150000"/>
-              </a:lnSpc>
-              <a:spcBef>
-                <a:spcPts val="360"/>
-              </a:spcBef>
-              <a:spcAft>
-                <a:spcPts val="0"/>
-              </a:spcAft>
-              <a:buSzPts val="1800"/>
-              <a:buFont typeface="Wingdings" panose="05000000000000000000" charset="0"/>
-              <a:buChar char="q"/>
-            </a:pPr>
-            <a:r>
-              <a:rPr sz="1800">
-                <a:latin typeface="Comic Sans MS" panose="030F0702030302020204" charset="0"/>
-                <a:cs typeface="Comic Sans MS" panose="030F0702030302020204" charset="0"/>
-              </a:rPr>
-              <a:t>The responsive of the application needs to be implemented to boost the application performance and to increase the availability of the website [5].</a:t>
-            </a:r>
-            <a:endParaRPr sz="1800">
-              <a:latin typeface="Comic Sans MS" panose="030F0702030302020204" charset="0"/>
-              <a:cs typeface="Comic Sans MS" panose="030F0702030302020204" charset="0"/>
-            </a:endParaRPr>
-          </a:p>
-          <a:p>
-            <a:pPr lvl="0" algn="l" rtl="0">
-              <a:lnSpc>
-                <a:spcPct val="150000"/>
-              </a:lnSpc>
-              <a:spcBef>
-                <a:spcPts val="360"/>
-              </a:spcBef>
-              <a:spcAft>
-                <a:spcPts val="0"/>
-              </a:spcAft>
-              <a:buSzPts val="1800"/>
-              <a:buFont typeface="Wingdings" panose="05000000000000000000" charset="0"/>
-              <a:buChar char="q"/>
-            </a:pPr>
-            <a:r>
-              <a:rPr sz="1800">
-                <a:latin typeface="Comic Sans MS" panose="030F0702030302020204" charset="0"/>
-                <a:cs typeface="Comic Sans MS" panose="030F0702030302020204" charset="0"/>
-              </a:rPr>
-              <a:t>Scalability to real world hospital scenario where large number of patients who want to access the application and requires complex scheduling requirements [7].</a:t>
-            </a:r>
-            <a:endParaRPr sz="1800">
-              <a:latin typeface="Comic Sans MS" panose="030F0702030302020204" charset="0"/>
-              <a:cs typeface="Comic Sans MS" panose="030F0702030302020204" charset="0"/>
-            </a:endParaRPr>
-          </a:p>
-        </p:txBody>
-      </p:sp>
+      </p:pic>
     </p:spTree>
   </p:cSld>
   <p:clrMapOvr>
@@ -9127,7 +9254,7 @@
                 <a:cs typeface="Algerian" panose="04020705040A02060702"/>
                 <a:sym typeface="Algerian" panose="04020705040A02060702"/>
               </a:rPr>
-              <a:t>objectives</a:t>
+              <a:t>gaps identified</a:t>
             </a:r>
             <a:endParaRPr lang="en-US" altLang="en-GB" sz="3400" u="sng">
               <a:latin typeface="Algerian" panose="04020705040A02060702"/>
@@ -9180,7 +9307,7 @@
                 <a:latin typeface="Comic Sans MS" panose="030F0702030302020204" charset="0"/>
                 <a:cs typeface="Comic Sans MS" panose="030F0702030302020204" charset="0"/>
               </a:rPr>
-              <a:t>To integrate the MERN stack to enable scalability and flexibility, making it simple to integrate new features and expand the system in the future.</a:t>
+              <a:t>The system may not be accessible to individuals with limited internet access or technological proficiency [4].</a:t>
             </a:r>
             <a:endParaRPr sz="1800">
               <a:latin typeface="Comic Sans MS" panose="030F0702030302020204" charset="0"/>
@@ -9207,7 +9334,21 @@
                 <a:latin typeface="Comic Sans MS" panose="030F0702030302020204" charset="0"/>
                 <a:cs typeface="Comic Sans MS" panose="030F0702030302020204" charset="0"/>
               </a:rPr>
-              <a:t>To increase efficiency in administration by providing resources for tracking inventory, scheduling appointments, checking doctor availability, and creating hospital reports.</a:t>
+              <a:t>The system</a:t>
+            </a:r>
+            <a:r>
+              <a:rPr lang="en-US" sz="1800">
+                <a:latin typeface="Comic Sans MS" panose="030F0702030302020204" charset="0"/>
+                <a:cs typeface="Comic Sans MS" panose="030F0702030302020204" charset="0"/>
+              </a:rPr>
+              <a:t>’ </a:t>
+            </a:r>
+            <a:r>
+              <a:rPr sz="1800">
+                <a:latin typeface="Comic Sans MS" panose="030F0702030302020204" charset="0"/>
+                <a:cs typeface="Comic Sans MS" panose="030F0702030302020204" charset="0"/>
+              </a:rPr>
+              <a:t>s reliability in accurately directing patients to the right department based on their symptoms might be a challenge, especially if the symptoms are complex or require in-person evaluation [5].</a:t>
             </a:r>
             <a:endParaRPr sz="1800">
               <a:latin typeface="Comic Sans MS" panose="030F0702030302020204" charset="0"/>
@@ -9234,7 +9375,7 @@
                 <a:latin typeface="Comic Sans MS" panose="030F0702030302020204" charset="0"/>
                 <a:cs typeface="Comic Sans MS" panose="030F0702030302020204" charset="0"/>
               </a:rPr>
-              <a:t>To improve patient care by providing a simple user friendly interface to the patients to schedule appointments, read prescriptions, and access medical data.</a:t>
+              <a:t>The responsive of the application needs to be implemented to boost the application performance and to increase the availability of the website [5].</a:t>
             </a:r>
             <a:endParaRPr sz="1800">
               <a:latin typeface="Comic Sans MS" panose="030F0702030302020204" charset="0"/>
@@ -9261,7 +9402,7 @@
                 <a:latin typeface="Comic Sans MS" panose="030F0702030302020204" charset="0"/>
                 <a:cs typeface="Comic Sans MS" panose="030F0702030302020204" charset="0"/>
               </a:rPr>
-              <a:t>To enable real-time data access for doctors, admins, and patients, ensuring fast access to the website.</a:t>
+              <a:t>Scalability to real world hospital scenario where large number of patients who want to access the application and requires complex scheduling requirements [7].</a:t>
             </a:r>
             <a:endParaRPr sz="1800">
               <a:latin typeface="Comic Sans MS" panose="030F0702030302020204" charset="0"/>
@@ -9316,8 +9457,8 @@
         </p:nvSpPr>
         <p:spPr>
           <a:xfrm>
-            <a:off x="793150" y="212383"/>
-            <a:ext cx="6408600" cy="637500"/>
+            <a:off x="246380" y="97790"/>
+            <a:ext cx="8804275" cy="673735"/>
           </a:xfrm>
           <a:prstGeom prst="rect">
             <a:avLst/>
@@ -9339,15 +9480,15 @@
               <a:buNone/>
             </a:pPr>
             <a:r>
-              <a:rPr lang="en-US" sz="3400" u="sng">
+              <a:rPr lang="en-US" altLang="en-GB" sz="3400" u="sng">
                 <a:latin typeface="Algerian" panose="04020705040A02060702"/>
                 <a:ea typeface="Algerian" panose="04020705040A02060702"/>
                 <a:cs typeface="Algerian" panose="04020705040A02060702"/>
                 <a:sym typeface="Algerian" panose="04020705040A02060702"/>
               </a:rPr>
-              <a:t>problem statement</a:t>
+              <a:t>objectives</a:t>
             </a:r>
-            <a:endParaRPr lang="en-US" sz="3400" u="sng">
+            <a:endParaRPr lang="en-US" altLang="en-GB" sz="3400" u="sng">
               <a:latin typeface="Algerian" panose="04020705040A02060702"/>
               <a:ea typeface="Algerian" panose="04020705040A02060702"/>
               <a:cs typeface="Algerian" panose="04020705040A02060702"/>
@@ -9366,8 +9507,8 @@
         </p:nvSpPr>
         <p:spPr>
           <a:xfrm>
-            <a:off x="484505" y="1527175"/>
-            <a:ext cx="8428990" cy="2794000"/>
+            <a:off x="107315" y="771525"/>
+            <a:ext cx="8943975" cy="4313555"/>
           </a:xfrm>
           <a:prstGeom prst="rect">
             <a:avLst/>
@@ -9379,33 +9520,111 @@
           </a:bodyPr>
           <a:lstStyle/>
           <a:p>
-            <a:pPr marL="0" lvl="0" indent="0" algn="just" rtl="0">
+            <a:pPr lvl="0" algn="l" rtl="0">
               <a:lnSpc>
-                <a:spcPct val="100000"/>
+                <a:spcPct val="150000"/>
               </a:lnSpc>
               <a:spcBef>
-                <a:spcPts val="0"/>
-              </a:spcBef>
-              <a:spcAft>
-                <a:spcPts val="0"/>
-              </a:spcAft>
+                <a:spcPts val="360"/>
+              </a:spcBef>
+              <a:spcAft>
+                <a:spcPts val="0"/>
+              </a:spcAft>
+              <a:buSzPts val="1800"/>
               <a:buFont typeface="Wingdings" panose="05000000000000000000" charset="0"/>
-              <a:buNone/>
+              <a:buChar char="q"/>
             </a:pPr>
             <a:r>
-              <a:rPr lang="en-US" sz="1800" b="0" dirty="0">
+              <a:rPr sz="1800">
                 <a:latin typeface="Comic Sans MS" panose="030F0702030302020204" charset="0"/>
-                <a:ea typeface="Open Sans" panose="020B0606030504020204" pitchFamily="34" charset="0"/>
-                <a:cs typeface="Open Sans" panose="020B0606030504020204" pitchFamily="34" charset="0"/>
-                <a:sym typeface="+mn-ea"/>
+                <a:cs typeface="Comic Sans MS" panose="030F0702030302020204" charset="0"/>
               </a:rPr>
-              <a:t>Ineffective manual processes in hospitals lead to mistakes, increased waiting times, and operational obstacles, affecting appointment management, medication tracking, and inventory control. Doctors struggle with resource management, while patients face difficulties in scheduling appointments and accessing medical records. Hospital administrators are burdened with manual tasks, impacting patient care quality and operational efficiency. Therefore, a comprehensive, web-based Hospital Management System (HMS) using the MERN stack is essential to automate key functions, improve efficiency, and enhance patient care while ensuring data security and scalability.</a:t>
+              <a:t>To integrate the MERN stack to enable scalability and flexibility, making it simple to integrate new features and expand the system in the future.</a:t>
             </a:r>
-            <a:endParaRPr lang="en-US" sz="1800" b="0" dirty="0">
+            <a:endParaRPr sz="1800">
               <a:latin typeface="Comic Sans MS" panose="030F0702030302020204" charset="0"/>
-              <a:ea typeface="Open Sans" panose="020B0606030504020204" pitchFamily="34" charset="0"/>
-              <a:cs typeface="Open Sans" panose="020B0606030504020204" pitchFamily="34" charset="0"/>
-              <a:sym typeface="+mn-ea"/>
+              <a:cs typeface="Comic Sans MS" panose="030F0702030302020204" charset="0"/>
+            </a:endParaRPr>
+          </a:p>
+          <a:p>
+            <a:pPr lvl="0" algn="l" rtl="0">
+              <a:lnSpc>
+                <a:spcPct val="150000"/>
+              </a:lnSpc>
+              <a:spcBef>
+                <a:spcPts val="360"/>
+              </a:spcBef>
+              <a:spcAft>
+                <a:spcPts val="0"/>
+              </a:spcAft>
+              <a:buSzPts val="1800"/>
+              <a:buFont typeface="Wingdings" panose="05000000000000000000" charset="0"/>
+              <a:buChar char="q"/>
+            </a:pPr>
+            <a:r>
+              <a:rPr sz="1800">
+                <a:latin typeface="Comic Sans MS" panose="030F0702030302020204" charset="0"/>
+                <a:cs typeface="Comic Sans MS" panose="030F0702030302020204" charset="0"/>
+              </a:rPr>
+              <a:t>To increase efficiency in administration by providing resources for tracking inventory, scheduling appointments, checking doctor availability, and creating hospital reports.</a:t>
+            </a:r>
+            <a:endParaRPr sz="1800">
+              <a:latin typeface="Comic Sans MS" panose="030F0702030302020204" charset="0"/>
+              <a:cs typeface="Comic Sans MS" panose="030F0702030302020204" charset="0"/>
+            </a:endParaRPr>
+          </a:p>
+          <a:p>
+            <a:pPr lvl="0" algn="l" rtl="0">
+              <a:lnSpc>
+                <a:spcPct val="150000"/>
+              </a:lnSpc>
+              <a:spcBef>
+                <a:spcPts val="360"/>
+              </a:spcBef>
+              <a:spcAft>
+                <a:spcPts val="0"/>
+              </a:spcAft>
+              <a:buSzPts val="1800"/>
+              <a:buFont typeface="Wingdings" panose="05000000000000000000" charset="0"/>
+              <a:buChar char="q"/>
+            </a:pPr>
+            <a:r>
+              <a:rPr sz="1800">
+                <a:latin typeface="Comic Sans MS" panose="030F0702030302020204" charset="0"/>
+                <a:cs typeface="Comic Sans MS" panose="030F0702030302020204" charset="0"/>
+              </a:rPr>
+              <a:t>To improve patient care by providing a simple user friendly interface to the patients to schedule appointments, read prescriptions, and access medical data.</a:t>
+            </a:r>
+            <a:endParaRPr sz="1800">
+              <a:latin typeface="Comic Sans MS" panose="030F0702030302020204" charset="0"/>
+              <a:cs typeface="Comic Sans MS" panose="030F0702030302020204" charset="0"/>
+            </a:endParaRPr>
+          </a:p>
+          <a:p>
+            <a:pPr lvl="0" algn="l" rtl="0">
+              <a:lnSpc>
+                <a:spcPct val="150000"/>
+              </a:lnSpc>
+              <a:spcBef>
+                <a:spcPts val="360"/>
+              </a:spcBef>
+              <a:spcAft>
+                <a:spcPts val="0"/>
+              </a:spcAft>
+              <a:buSzPts val="1800"/>
+              <a:buFont typeface="Wingdings" panose="05000000000000000000" charset="0"/>
+              <a:buChar char="q"/>
+            </a:pPr>
+            <a:r>
+              <a:rPr sz="1800">
+                <a:latin typeface="Comic Sans MS" panose="030F0702030302020204" charset="0"/>
+                <a:cs typeface="Comic Sans MS" panose="030F0702030302020204" charset="0"/>
+              </a:rPr>
+              <a:t>To enable real-time data access for doctors, admins, and patients, ensuring fast access to the website.</a:t>
+            </a:r>
+            <a:endParaRPr sz="1800">
+              <a:latin typeface="Comic Sans MS" panose="030F0702030302020204" charset="0"/>
+              <a:cs typeface="Comic Sans MS" panose="030F0702030302020204" charset="0"/>
             </a:endParaRPr>
           </a:p>
         </p:txBody>
@@ -9456,8 +9675,8 @@
         </p:nvSpPr>
         <p:spPr>
           <a:xfrm>
-            <a:off x="263525" y="212090"/>
-            <a:ext cx="6938010" cy="637540"/>
+            <a:off x="793150" y="212383"/>
+            <a:ext cx="6408600" cy="637500"/>
           </a:xfrm>
           <a:prstGeom prst="rect">
             <a:avLst/>
@@ -9485,7 +9704,7 @@
                 <a:cs typeface="Algerian" panose="04020705040A02060702"/>
                 <a:sym typeface="Algerian" panose="04020705040A02060702"/>
               </a:rPr>
-              <a:t>project plan</a:t>
+              <a:t>problem statement</a:t>
             </a:r>
             <a:endParaRPr lang="en-US" sz="3400" u="sng">
               <a:latin typeface="Algerian" panose="04020705040A02060702"/>
@@ -9506,8 +9725,8 @@
         </p:nvSpPr>
         <p:spPr>
           <a:xfrm>
-            <a:off x="263525" y="1035685"/>
-            <a:ext cx="8649970" cy="3898265"/>
+            <a:off x="484505" y="1527175"/>
+            <a:ext cx="8428990" cy="2794000"/>
           </a:xfrm>
           <a:prstGeom prst="rect">
             <a:avLst/>
@@ -9519,9 +9738,9 @@
           </a:bodyPr>
           <a:lstStyle/>
           <a:p>
-            <a:pPr marL="285750" lvl="0" indent="-285750" algn="just" rtl="0">
+            <a:pPr marL="0" lvl="0" indent="0" algn="just" rtl="0">
               <a:lnSpc>
-                <a:spcPct val="150000"/>
+                <a:spcPct val="100000"/>
               </a:lnSpc>
               <a:spcBef>
                 <a:spcPts val="0"/>
@@ -9530,7 +9749,7 @@
                 <a:spcPts val="0"/>
               </a:spcAft>
               <a:buFont typeface="Wingdings" panose="05000000000000000000" charset="0"/>
-              <a:buChar char="q"/>
+              <a:buNone/>
             </a:pPr>
             <a:r>
               <a:rPr lang="en-US" sz="1800" b="0" dirty="0">
@@ -9539,217 +9758,7 @@
                 <a:cs typeface="Open Sans" panose="020B0606030504020204" pitchFamily="34" charset="0"/>
                 <a:sym typeface="+mn-ea"/>
               </a:rPr>
-              <a:t>Phase 1: Project planning and brainstorming (July)</a:t>
-            </a:r>
-            <a:endParaRPr lang="en-US" sz="1800" b="0" dirty="0">
-              <a:latin typeface="Comic Sans MS" panose="030F0702030302020204" charset="0"/>
-              <a:ea typeface="Open Sans" panose="020B0606030504020204" pitchFamily="34" charset="0"/>
-              <a:cs typeface="Open Sans" panose="020B0606030504020204" pitchFamily="34" charset="0"/>
-              <a:sym typeface="+mn-ea"/>
-            </a:endParaRPr>
-          </a:p>
-          <a:p>
-            <a:pPr marL="285750" lvl="0" indent="-285750" algn="just" rtl="0">
-              <a:lnSpc>
-                <a:spcPct val="150000"/>
-              </a:lnSpc>
-              <a:spcBef>
-                <a:spcPts val="0"/>
-              </a:spcBef>
-              <a:spcAft>
-                <a:spcPts val="0"/>
-              </a:spcAft>
-              <a:buFont typeface="Wingdings" panose="05000000000000000000" charset="0"/>
-              <a:buChar char="q"/>
-            </a:pPr>
-            <a:r>
-              <a:rPr lang="en-US" sz="1800" b="0" dirty="0">
-                <a:latin typeface="Comic Sans MS" panose="030F0702030302020204" charset="0"/>
-                <a:ea typeface="Open Sans" panose="020B0606030504020204" pitchFamily="34" charset="0"/>
-                <a:cs typeface="Open Sans" panose="020B0606030504020204" pitchFamily="34" charset="0"/>
-                <a:sym typeface="+mn-ea"/>
-              </a:rPr>
-              <a:t>Phase 2: Review 0 and Literature Survey (August)</a:t>
-            </a:r>
-            <a:endParaRPr lang="en-US" sz="1800" b="0" dirty="0">
-              <a:latin typeface="Comic Sans MS" panose="030F0702030302020204" charset="0"/>
-              <a:ea typeface="Open Sans" panose="020B0606030504020204" pitchFamily="34" charset="0"/>
-              <a:cs typeface="Open Sans" panose="020B0606030504020204" pitchFamily="34" charset="0"/>
-              <a:sym typeface="+mn-ea"/>
-            </a:endParaRPr>
-          </a:p>
-          <a:p>
-            <a:pPr marL="285750" lvl="0" indent="-285750" algn="just" rtl="0">
-              <a:lnSpc>
-                <a:spcPct val="150000"/>
-              </a:lnSpc>
-              <a:spcBef>
-                <a:spcPts val="0"/>
-              </a:spcBef>
-              <a:spcAft>
-                <a:spcPts val="0"/>
-              </a:spcAft>
-              <a:buFont typeface="Wingdings" panose="05000000000000000000" charset="0"/>
-              <a:buChar char="q"/>
-            </a:pPr>
-            <a:r>
-              <a:rPr lang="en-US" sz="1800" b="0" dirty="0">
-                <a:latin typeface="Comic Sans MS" panose="030F0702030302020204" charset="0"/>
-                <a:ea typeface="Open Sans" panose="020B0606030504020204" pitchFamily="34" charset="0"/>
-                <a:cs typeface="Open Sans" panose="020B0606030504020204" pitchFamily="34" charset="0"/>
-                <a:sym typeface="+mn-ea"/>
-              </a:rPr>
-              <a:t>Phase 3: Finding gaps in literature survey (September)</a:t>
-            </a:r>
-            <a:endParaRPr lang="en-US" sz="1800" b="0" dirty="0">
-              <a:latin typeface="Comic Sans MS" panose="030F0702030302020204" charset="0"/>
-              <a:ea typeface="Open Sans" panose="020B0606030504020204" pitchFamily="34" charset="0"/>
-              <a:cs typeface="Open Sans" panose="020B0606030504020204" pitchFamily="34" charset="0"/>
-              <a:sym typeface="+mn-ea"/>
-            </a:endParaRPr>
-          </a:p>
-          <a:p>
-            <a:pPr marL="285750" lvl="0" indent="-285750" algn="just" rtl="0">
-              <a:lnSpc>
-                <a:spcPct val="150000"/>
-              </a:lnSpc>
-              <a:spcBef>
-                <a:spcPts val="0"/>
-              </a:spcBef>
-              <a:spcAft>
-                <a:spcPts val="0"/>
-              </a:spcAft>
-              <a:buFont typeface="Wingdings" panose="05000000000000000000" charset="0"/>
-              <a:buChar char="q"/>
-            </a:pPr>
-            <a:r>
-              <a:rPr lang="en-US" sz="1800" b="0" dirty="0">
-                <a:latin typeface="Comic Sans MS" panose="030F0702030302020204" charset="0"/>
-                <a:ea typeface="Open Sans" panose="020B0606030504020204" pitchFamily="34" charset="0"/>
-                <a:cs typeface="Open Sans" panose="020B0606030504020204" pitchFamily="34" charset="0"/>
-                <a:sym typeface="+mn-ea"/>
-              </a:rPr>
-              <a:t>Phase 4: Proposed Architecture and Review 1 (October)</a:t>
-            </a:r>
-            <a:endParaRPr lang="en-US" sz="1800" b="0" dirty="0">
-              <a:latin typeface="Comic Sans MS" panose="030F0702030302020204" charset="0"/>
-              <a:ea typeface="Open Sans" panose="020B0606030504020204" pitchFamily="34" charset="0"/>
-              <a:cs typeface="Open Sans" panose="020B0606030504020204" pitchFamily="34" charset="0"/>
-              <a:sym typeface="+mn-ea"/>
-            </a:endParaRPr>
-          </a:p>
-          <a:p>
-            <a:pPr marL="285750" lvl="0" indent="-285750" algn="just" rtl="0">
-              <a:lnSpc>
-                <a:spcPct val="150000"/>
-              </a:lnSpc>
-              <a:spcBef>
-                <a:spcPts val="0"/>
-              </a:spcBef>
-              <a:spcAft>
-                <a:spcPts val="0"/>
-              </a:spcAft>
-              <a:buFont typeface="Wingdings" panose="05000000000000000000" charset="0"/>
-              <a:buChar char="q"/>
-            </a:pPr>
-            <a:r>
-              <a:rPr lang="en-US" sz="1800" b="0" dirty="0">
-                <a:latin typeface="Comic Sans MS" panose="030F0702030302020204" charset="0"/>
-                <a:ea typeface="Open Sans" panose="020B0606030504020204" pitchFamily="34" charset="0"/>
-                <a:cs typeface="Open Sans" panose="020B0606030504020204" pitchFamily="34" charset="0"/>
-                <a:sym typeface="+mn-ea"/>
-              </a:rPr>
-              <a:t>Phase 5: Implementation (November)</a:t>
-            </a:r>
-            <a:endParaRPr lang="en-US" sz="1800" b="0" dirty="0">
-              <a:latin typeface="Comic Sans MS" panose="030F0702030302020204" charset="0"/>
-              <a:ea typeface="Open Sans" panose="020B0606030504020204" pitchFamily="34" charset="0"/>
-              <a:cs typeface="Open Sans" panose="020B0606030504020204" pitchFamily="34" charset="0"/>
-              <a:sym typeface="+mn-ea"/>
-            </a:endParaRPr>
-          </a:p>
-          <a:p>
-            <a:pPr marL="285750" lvl="0" indent="-285750" algn="just" rtl="0">
-              <a:lnSpc>
-                <a:spcPct val="150000"/>
-              </a:lnSpc>
-              <a:spcBef>
-                <a:spcPts val="0"/>
-              </a:spcBef>
-              <a:spcAft>
-                <a:spcPts val="0"/>
-              </a:spcAft>
-              <a:buFont typeface="Wingdings" panose="05000000000000000000" charset="0"/>
-              <a:buChar char="q"/>
-            </a:pPr>
-            <a:r>
-              <a:rPr lang="en-US" sz="1800" b="0" dirty="0">
-                <a:latin typeface="Comic Sans MS" panose="030F0702030302020204" charset="0"/>
-                <a:ea typeface="Open Sans" panose="020B0606030504020204" pitchFamily="34" charset="0"/>
-                <a:cs typeface="Open Sans" panose="020B0606030504020204" pitchFamily="34" charset="0"/>
-                <a:sym typeface="+mn-ea"/>
-              </a:rPr>
-              <a:t>Phase 6: Backend Implementation (December)</a:t>
-            </a:r>
-            <a:endParaRPr lang="en-US" sz="1800" b="0" dirty="0">
-              <a:latin typeface="Comic Sans MS" panose="030F0702030302020204" charset="0"/>
-              <a:ea typeface="Open Sans" panose="020B0606030504020204" pitchFamily="34" charset="0"/>
-              <a:cs typeface="Open Sans" panose="020B0606030504020204" pitchFamily="34" charset="0"/>
-              <a:sym typeface="+mn-ea"/>
-            </a:endParaRPr>
-          </a:p>
-          <a:p>
-            <a:pPr marL="285750" lvl="0" indent="-285750" algn="just" rtl="0">
-              <a:lnSpc>
-                <a:spcPct val="150000"/>
-              </a:lnSpc>
-              <a:spcBef>
-                <a:spcPts val="0"/>
-              </a:spcBef>
-              <a:spcAft>
-                <a:spcPts val="0"/>
-              </a:spcAft>
-              <a:buFont typeface="Wingdings" panose="05000000000000000000" charset="0"/>
-              <a:buChar char="q"/>
-            </a:pPr>
-            <a:r>
-              <a:rPr lang="en-US" sz="1800" b="0" dirty="0">
-                <a:latin typeface="Comic Sans MS" panose="030F0702030302020204" charset="0"/>
-                <a:ea typeface="Open Sans" panose="020B0606030504020204" pitchFamily="34" charset="0"/>
-                <a:cs typeface="Open Sans" panose="020B0606030504020204" pitchFamily="34" charset="0"/>
-                <a:sym typeface="+mn-ea"/>
-              </a:rPr>
-              <a:t>Phase 7: Review 2 (January)</a:t>
-            </a:r>
-            <a:endParaRPr lang="en-US" sz="1800" b="0" dirty="0">
-              <a:latin typeface="Comic Sans MS" panose="030F0702030302020204" charset="0"/>
-              <a:ea typeface="Open Sans" panose="020B0606030504020204" pitchFamily="34" charset="0"/>
-              <a:cs typeface="Open Sans" panose="020B0606030504020204" pitchFamily="34" charset="0"/>
-              <a:sym typeface="+mn-ea"/>
-            </a:endParaRPr>
-          </a:p>
-          <a:p>
-            <a:pPr marL="285750" lvl="0" indent="-285750" algn="just" rtl="0">
-              <a:lnSpc>
-                <a:spcPct val="150000"/>
-              </a:lnSpc>
-              <a:spcBef>
-                <a:spcPts val="0"/>
-              </a:spcBef>
-              <a:spcAft>
-                <a:spcPts val="0"/>
-              </a:spcAft>
-              <a:buFont typeface="Wingdings" panose="05000000000000000000" charset="0"/>
-              <a:buChar char="q"/>
-            </a:pPr>
-            <a:r>
-              <a:rPr lang="en-US" sz="1800" b="0" dirty="0">
-                <a:latin typeface="Comic Sans MS" panose="030F0702030302020204" charset="0"/>
-                <a:ea typeface="Open Sans" panose="020B0606030504020204" pitchFamily="34" charset="0"/>
-                <a:cs typeface="Open Sans" panose="020B0606030504020204" pitchFamily="34" charset="0"/>
-                <a:sym typeface="+mn-ea"/>
-              </a:rPr>
-              <a:t>Final Phase: Review 3 (February)</a:t>
+              <a:t>Ineffective manual processes in hospitals lead to mistakes, increased waiting times, and operational obstacles, affecting appointment management, medication tracking, and inventory control. Doctors struggle with resource management, while patients face difficulties in scheduling appointments and accessing medical records. Hospital administrators are burdened with manual tasks, impacting patient care quality and operational efficiency. Therefore, a comprehensive, web-based Hospital Management System (HMS) using the MERN stack is essential to automate key functions, improve efficiency, and enhance patient care while ensuring data security and scalability.</a:t>
             </a:r>
             <a:endParaRPr lang="en-US" sz="1800" b="0" dirty="0">
               <a:latin typeface="Comic Sans MS" panose="030F0702030302020204" charset="0"/>
@@ -9806,8 +9815,8 @@
         </p:nvSpPr>
         <p:spPr>
           <a:xfrm>
-            <a:off x="194310" y="1033145"/>
-            <a:ext cx="2332990" cy="1778000"/>
+            <a:off x="263525" y="212090"/>
+            <a:ext cx="6938010" cy="637540"/>
           </a:xfrm>
           <a:prstGeom prst="rect">
             <a:avLst/>
@@ -9829,32 +9838,15 @@
               <a:buNone/>
             </a:pPr>
             <a:r>
-              <a:rPr lang="en-US" b="0" u="sng">
+              <a:rPr lang="en-US" sz="3400" u="sng">
                 <a:latin typeface="Algerian" panose="04020705040A02060702"/>
                 <a:ea typeface="Algerian" panose="04020705040A02060702"/>
                 <a:cs typeface="Algerian" panose="04020705040A02060702"/>
                 <a:sym typeface="Algerian" panose="04020705040A02060702"/>
               </a:rPr>
-              <a:t>proposed </a:t>
+              <a:t>project plan</a:t>
             </a:r>
-            <a:br>
-              <a:rPr lang="en-US" b="0" u="sng">
-                <a:latin typeface="Algerian" panose="04020705040A02060702"/>
-                <a:ea typeface="Algerian" panose="04020705040A02060702"/>
-                <a:cs typeface="Algerian" panose="04020705040A02060702"/>
-                <a:sym typeface="Algerian" panose="04020705040A02060702"/>
-              </a:rPr>
-            </a:br>
-            <a:r>
-              <a:rPr lang="en-US" b="0" u="sng">
-                <a:latin typeface="Algerian" panose="04020705040A02060702"/>
-                <a:ea typeface="Algerian" panose="04020705040A02060702"/>
-                <a:cs typeface="Algerian" panose="04020705040A02060702"/>
-                <a:sym typeface="Algerian" panose="04020705040A02060702"/>
-              </a:rPr>
-              <a:t>architecture</a:t>
-            </a:r>
-            <a:endParaRPr lang="en-US" b="0" u="sng">
+            <a:endParaRPr lang="en-US" sz="3400" u="sng">
               <a:latin typeface="Algerian" panose="04020705040A02060702"/>
               <a:ea typeface="Algerian" panose="04020705040A02060702"/>
               <a:cs typeface="Algerian" panose="04020705040A02060702"/>
@@ -9863,32 +9855,270 @@
           </a:p>
         </p:txBody>
       </p:sp>
-      <p:pic>
-        <p:nvPicPr>
-          <p:cNvPr id="2" name="Picture Placeholder 1" descr="Untitled Diagram2.drawio (1)_page-0001"/>
-          <p:cNvPicPr>
-            <a:picLocks noChangeAspect="1"/>
-          </p:cNvPicPr>
+      <p:sp>
+        <p:nvSpPr>
+          <p:cNvPr id="55" name="Google Shape;55;p14"/>
+          <p:cNvSpPr txBox="1"/>
           <p:nvPr>
-            <p:ph type="pic" idx="2"/>
+            <p:ph type="body" idx="1"/>
           </p:nvPr>
-        </p:nvPicPr>
-        <p:blipFill>
-          <a:blip r:embed="rId2"/>
-          <a:stretch>
-            <a:fillRect/>
-          </a:stretch>
-        </p:blipFill>
+        </p:nvSpPr>
         <p:spPr>
           <a:xfrm>
-            <a:off x="2454275" y="167005"/>
-            <a:ext cx="6506210" cy="4887595"/>
+            <a:off x="263525" y="1035685"/>
+            <a:ext cx="8649970" cy="3898265"/>
           </a:xfrm>
           <a:prstGeom prst="rect">
             <a:avLst/>
           </a:prstGeom>
         </p:spPr>
-      </p:pic>
+        <p:txBody>
+          <a:bodyPr spcFirstLastPara="1" wrap="square" lIns="91425" tIns="45700" rIns="91425" bIns="45700" anchor="t" anchorCtr="0">
+            <a:noAutofit/>
+          </a:bodyPr>
+          <a:lstStyle/>
+          <a:p>
+            <a:pPr marL="285750" lvl="0" indent="-285750" algn="just" rtl="0">
+              <a:lnSpc>
+                <a:spcPct val="150000"/>
+              </a:lnSpc>
+              <a:spcBef>
+                <a:spcPts val="0"/>
+              </a:spcBef>
+              <a:spcAft>
+                <a:spcPts val="0"/>
+              </a:spcAft>
+              <a:buFont typeface="Wingdings" panose="05000000000000000000" charset="0"/>
+              <a:buChar char="q"/>
+            </a:pPr>
+            <a:r>
+              <a:rPr lang="en-US" sz="1800" b="0" dirty="0">
+                <a:latin typeface="Comic Sans MS" panose="030F0702030302020204" charset="0"/>
+                <a:ea typeface="Open Sans" panose="020B0606030504020204" pitchFamily="34" charset="0"/>
+                <a:cs typeface="Open Sans" panose="020B0606030504020204" pitchFamily="34" charset="0"/>
+                <a:sym typeface="+mn-ea"/>
+              </a:rPr>
+              <a:t>Phase 1: Project planning and brainstorming (July)</a:t>
+            </a:r>
+            <a:endParaRPr lang="en-US" sz="1800" b="0" dirty="0">
+              <a:latin typeface="Comic Sans MS" panose="030F0702030302020204" charset="0"/>
+              <a:ea typeface="Open Sans" panose="020B0606030504020204" pitchFamily="34" charset="0"/>
+              <a:cs typeface="Open Sans" panose="020B0606030504020204" pitchFamily="34" charset="0"/>
+              <a:sym typeface="+mn-ea"/>
+            </a:endParaRPr>
+          </a:p>
+          <a:p>
+            <a:pPr marL="285750" lvl="0" indent="-285750" algn="just" rtl="0">
+              <a:lnSpc>
+                <a:spcPct val="150000"/>
+              </a:lnSpc>
+              <a:spcBef>
+                <a:spcPts val="0"/>
+              </a:spcBef>
+              <a:spcAft>
+                <a:spcPts val="0"/>
+              </a:spcAft>
+              <a:buFont typeface="Wingdings" panose="05000000000000000000" charset="0"/>
+              <a:buChar char="q"/>
+            </a:pPr>
+            <a:r>
+              <a:rPr lang="en-US" sz="1800" b="0" dirty="0">
+                <a:latin typeface="Comic Sans MS" panose="030F0702030302020204" charset="0"/>
+                <a:ea typeface="Open Sans" panose="020B0606030504020204" pitchFamily="34" charset="0"/>
+                <a:cs typeface="Open Sans" panose="020B0606030504020204" pitchFamily="34" charset="0"/>
+                <a:sym typeface="+mn-ea"/>
+              </a:rPr>
+              <a:t>Phase 2: Review 0 and Literature Survey (August)</a:t>
+            </a:r>
+            <a:endParaRPr lang="en-US" sz="1800" b="0" dirty="0">
+              <a:latin typeface="Comic Sans MS" panose="030F0702030302020204" charset="0"/>
+              <a:ea typeface="Open Sans" panose="020B0606030504020204" pitchFamily="34" charset="0"/>
+              <a:cs typeface="Open Sans" panose="020B0606030504020204" pitchFamily="34" charset="0"/>
+              <a:sym typeface="+mn-ea"/>
+            </a:endParaRPr>
+          </a:p>
+          <a:p>
+            <a:pPr marL="285750" lvl="0" indent="-285750" algn="just" rtl="0">
+              <a:lnSpc>
+                <a:spcPct val="150000"/>
+              </a:lnSpc>
+              <a:spcBef>
+                <a:spcPts val="0"/>
+              </a:spcBef>
+              <a:spcAft>
+                <a:spcPts val="0"/>
+              </a:spcAft>
+              <a:buFont typeface="Wingdings" panose="05000000000000000000" charset="0"/>
+              <a:buChar char="q"/>
+            </a:pPr>
+            <a:r>
+              <a:rPr lang="en-US" sz="1800" b="0" dirty="0">
+                <a:latin typeface="Comic Sans MS" panose="030F0702030302020204" charset="0"/>
+                <a:ea typeface="Open Sans" panose="020B0606030504020204" pitchFamily="34" charset="0"/>
+                <a:cs typeface="Open Sans" panose="020B0606030504020204" pitchFamily="34" charset="0"/>
+                <a:sym typeface="+mn-ea"/>
+              </a:rPr>
+              <a:t>Phase 3: Finding gaps in literature survey (September)</a:t>
+            </a:r>
+            <a:endParaRPr lang="en-US" sz="1800" b="0" dirty="0">
+              <a:latin typeface="Comic Sans MS" panose="030F0702030302020204" charset="0"/>
+              <a:ea typeface="Open Sans" panose="020B0606030504020204" pitchFamily="34" charset="0"/>
+              <a:cs typeface="Open Sans" panose="020B0606030504020204" pitchFamily="34" charset="0"/>
+              <a:sym typeface="+mn-ea"/>
+            </a:endParaRPr>
+          </a:p>
+          <a:p>
+            <a:pPr marL="285750" lvl="0" indent="-285750" algn="just" rtl="0">
+              <a:lnSpc>
+                <a:spcPct val="150000"/>
+              </a:lnSpc>
+              <a:spcBef>
+                <a:spcPts val="0"/>
+              </a:spcBef>
+              <a:spcAft>
+                <a:spcPts val="0"/>
+              </a:spcAft>
+              <a:buFont typeface="Wingdings" panose="05000000000000000000" charset="0"/>
+              <a:buChar char="q"/>
+            </a:pPr>
+            <a:r>
+              <a:rPr lang="en-US" sz="1800" b="0" dirty="0">
+                <a:latin typeface="Comic Sans MS" panose="030F0702030302020204" charset="0"/>
+                <a:ea typeface="Open Sans" panose="020B0606030504020204" pitchFamily="34" charset="0"/>
+                <a:cs typeface="Open Sans" panose="020B0606030504020204" pitchFamily="34" charset="0"/>
+                <a:sym typeface="+mn-ea"/>
+              </a:rPr>
+              <a:t>Phase 4: Proposed Architecture and Review 1 (October)</a:t>
+            </a:r>
+            <a:endParaRPr lang="en-US" sz="1800" b="0" dirty="0">
+              <a:latin typeface="Comic Sans MS" panose="030F0702030302020204" charset="0"/>
+              <a:ea typeface="Open Sans" panose="020B0606030504020204" pitchFamily="34" charset="0"/>
+              <a:cs typeface="Open Sans" panose="020B0606030504020204" pitchFamily="34" charset="0"/>
+              <a:sym typeface="+mn-ea"/>
+            </a:endParaRPr>
+          </a:p>
+          <a:p>
+            <a:pPr marL="285750" lvl="0" indent="-285750" algn="just" rtl="0">
+              <a:lnSpc>
+                <a:spcPct val="150000"/>
+              </a:lnSpc>
+              <a:spcBef>
+                <a:spcPts val="0"/>
+              </a:spcBef>
+              <a:spcAft>
+                <a:spcPts val="0"/>
+              </a:spcAft>
+              <a:buFont typeface="Wingdings" panose="05000000000000000000" charset="0"/>
+              <a:buChar char="q"/>
+            </a:pPr>
+            <a:r>
+              <a:rPr lang="en-US" sz="1800" b="0" dirty="0">
+                <a:latin typeface="Comic Sans MS" panose="030F0702030302020204" charset="0"/>
+                <a:ea typeface="Open Sans" panose="020B0606030504020204" pitchFamily="34" charset="0"/>
+                <a:cs typeface="Open Sans" panose="020B0606030504020204" pitchFamily="34" charset="0"/>
+                <a:sym typeface="+mn-ea"/>
+              </a:rPr>
+              <a:t>Phase 5: Installing packages and Frontend Implementation (November)</a:t>
+            </a:r>
+            <a:endParaRPr lang="en-US" sz="1800" b="0" dirty="0">
+              <a:latin typeface="Comic Sans MS" panose="030F0702030302020204" charset="0"/>
+              <a:ea typeface="Open Sans" panose="020B0606030504020204" pitchFamily="34" charset="0"/>
+              <a:cs typeface="Open Sans" panose="020B0606030504020204" pitchFamily="34" charset="0"/>
+              <a:sym typeface="+mn-ea"/>
+            </a:endParaRPr>
+          </a:p>
+          <a:p>
+            <a:pPr marL="285750" lvl="0" indent="-285750" algn="just" rtl="0">
+              <a:lnSpc>
+                <a:spcPct val="150000"/>
+              </a:lnSpc>
+              <a:spcBef>
+                <a:spcPts val="0"/>
+              </a:spcBef>
+              <a:spcAft>
+                <a:spcPts val="0"/>
+              </a:spcAft>
+              <a:buFont typeface="Wingdings" panose="05000000000000000000" charset="0"/>
+              <a:buChar char="q"/>
+            </a:pPr>
+            <a:r>
+              <a:rPr lang="en-US" sz="1800" b="0" dirty="0">
+                <a:latin typeface="Comic Sans MS" panose="030F0702030302020204" charset="0"/>
+                <a:ea typeface="Open Sans" panose="020B0606030504020204" pitchFamily="34" charset="0"/>
+                <a:cs typeface="Open Sans" panose="020B0606030504020204" pitchFamily="34" charset="0"/>
+                <a:sym typeface="+mn-ea"/>
+              </a:rPr>
+              <a:t>Phase 6: Backend Implementation (December)</a:t>
+            </a:r>
+            <a:endParaRPr lang="en-US" sz="1800" b="0" dirty="0">
+              <a:latin typeface="Comic Sans MS" panose="030F0702030302020204" charset="0"/>
+              <a:ea typeface="Open Sans" panose="020B0606030504020204" pitchFamily="34" charset="0"/>
+              <a:cs typeface="Open Sans" panose="020B0606030504020204" pitchFamily="34" charset="0"/>
+              <a:sym typeface="+mn-ea"/>
+            </a:endParaRPr>
+          </a:p>
+          <a:p>
+            <a:pPr marL="285750" lvl="0" indent="-285750" algn="just" rtl="0">
+              <a:lnSpc>
+                <a:spcPct val="150000"/>
+              </a:lnSpc>
+              <a:spcBef>
+                <a:spcPts val="0"/>
+              </a:spcBef>
+              <a:spcAft>
+                <a:spcPts val="0"/>
+              </a:spcAft>
+              <a:buFont typeface="Wingdings" panose="05000000000000000000" charset="0"/>
+              <a:buChar char="q"/>
+            </a:pPr>
+            <a:r>
+              <a:rPr lang="en-US" sz="1800" b="0" dirty="0">
+                <a:latin typeface="Comic Sans MS" panose="030F0702030302020204" charset="0"/>
+                <a:ea typeface="Open Sans" panose="020B0606030504020204" pitchFamily="34" charset="0"/>
+                <a:cs typeface="Open Sans" panose="020B0606030504020204" pitchFamily="34" charset="0"/>
+                <a:sym typeface="+mn-ea"/>
+              </a:rPr>
+              <a:t>Phase 7: Review 2 (January)</a:t>
+            </a:r>
+            <a:endParaRPr lang="en-US" sz="1800" b="0" dirty="0">
+              <a:latin typeface="Comic Sans MS" panose="030F0702030302020204" charset="0"/>
+              <a:ea typeface="Open Sans" panose="020B0606030504020204" pitchFamily="34" charset="0"/>
+              <a:cs typeface="Open Sans" panose="020B0606030504020204" pitchFamily="34" charset="0"/>
+              <a:sym typeface="+mn-ea"/>
+            </a:endParaRPr>
+          </a:p>
+          <a:p>
+            <a:pPr marL="285750" lvl="0" indent="-285750" algn="just" rtl="0">
+              <a:lnSpc>
+                <a:spcPct val="150000"/>
+              </a:lnSpc>
+              <a:spcBef>
+                <a:spcPts val="0"/>
+              </a:spcBef>
+              <a:spcAft>
+                <a:spcPts val="0"/>
+              </a:spcAft>
+              <a:buFont typeface="Wingdings" panose="05000000000000000000" charset="0"/>
+              <a:buChar char="q"/>
+            </a:pPr>
+            <a:r>
+              <a:rPr lang="en-US" sz="1800" b="0" dirty="0">
+                <a:latin typeface="Comic Sans MS" panose="030F0702030302020204" charset="0"/>
+                <a:ea typeface="Open Sans" panose="020B0606030504020204" pitchFamily="34" charset="0"/>
+                <a:cs typeface="Open Sans" panose="020B0606030504020204" pitchFamily="34" charset="0"/>
+                <a:sym typeface="+mn-ea"/>
+              </a:rPr>
+              <a:t>Final Phase: Review 3 (February)</a:t>
+            </a:r>
+            <a:endParaRPr lang="en-US" sz="1800" b="0" dirty="0">
+              <a:latin typeface="Comic Sans MS" panose="030F0702030302020204" charset="0"/>
+              <a:ea typeface="Open Sans" panose="020B0606030504020204" pitchFamily="34" charset="0"/>
+              <a:cs typeface="Open Sans" panose="020B0606030504020204" pitchFamily="34" charset="0"/>
+              <a:sym typeface="+mn-ea"/>
+            </a:endParaRPr>
+          </a:p>
+        </p:txBody>
+      </p:sp>
     </p:spTree>
   </p:cSld>
   <p:clrMapOvr>
